--- a/Sentinel_Presentation.pptx
+++ b/Sentinel_Presentation.pptx
@@ -4289,7 +4289,7 @@
               </a:defRPr>
             </a:pPr>
             <a:r>
-              <a:t>• Official Live Application: https://sentinel-eight.vercel.app/</a:t>
+              <a:t>• Official Live Application: https://plantbrain-eight.vercel.app/</a:t>
             </a:r>
           </a:p>
           <a:p>
